--- a/data/employees/EMP063/AST-EMP063-01.pptx
+++ b/data/employees/EMP063/AST-EMP063-01.pptx
@@ -9,6 +9,7 @@
     <p:sldId id="257" r:id="rId8"/>
     <p:sldId id="258" r:id="rId9"/>
     <p:sldId id="259" r:id="rId10"/>
+    <p:sldId id="260" r:id="rId11"/>
   </p:sldIdLst>
   <p:sldSz cx="9144000" cy="6858000" type="screen4x3"/>
   <p:notesSz cx="6858000" cy="9144000"/>
@@ -3098,42 +3099,55 @@
             <a:spLocks noGrp="1"/>
           </p:cNvSpPr>
           <p:nvPr>
-            <p:ph type="ctrTitle"/>
-          </p:nvPr>
-        </p:nvSpPr>
-        <p:spPr/>
-        <p:txBody>
-          <a:bodyPr/>
-          <a:lstStyle/>
-          <a:p>
-            <a:r>
-              <a:t>Project update deck - EMP063</a:t>
-            </a:r>
-          </a:p>
-        </p:txBody>
-      </p:sp>
-      <p:sp>
-        <p:nvSpPr>
-          <p:cNvPr id="3" name="Subtitle 2"/>
-          <p:cNvSpPr>
-            <a:spLocks noGrp="1"/>
-          </p:cNvSpPr>
-          <p:nvPr>
-            <p:ph type="subTitle" idx="1"/>
-          </p:nvPr>
-        </p:nvSpPr>
-        <p:spPr/>
-        <p:txBody>
-          <a:bodyPr/>
-          <a:lstStyle/>
-          <a:p>
-            <a:r>
-              <a:t>Taylor Miller | Director | R&amp;D</a:t>
-            </a:r>
-          </a:p>
-          <a:p>
-            <a:r>
-              <a:t>Prepared: 2025-03-06</a:t>
+            <p:ph type="title"/>
+          </p:nvPr>
+        </p:nvSpPr>
+        <p:spPr/>
+        <p:txBody>
+          <a:bodyPr/>
+          <a:lstStyle/>
+          <a:p>
+            <a:r>
+              <a:t>Ast Emp063 01 - EMP063</a:t>
+            </a:r>
+          </a:p>
+        </p:txBody>
+      </p:sp>
+      <p:sp>
+        <p:nvSpPr>
+          <p:cNvPr id="3" name="Content Placeholder 2"/>
+          <p:cNvSpPr>
+            <a:spLocks noGrp="1"/>
+          </p:cNvSpPr>
+          <p:nvPr>
+            <p:ph idx="1"/>
+          </p:nvPr>
+        </p:nvSpPr>
+        <p:spPr/>
+        <p:txBody>
+          <a:bodyPr/>
+          <a:lstStyle/>
+          <a:p>
+            <a:r>
+              <a:t>Slide 1: Executive Summary</a:t>
+            </a:r>
+          </a:p>
+          <a:p>
+            <a:pPr lvl="1"/>
+            <a:r>
+              <a:t>Section 1: Fabric semantic model planning. EMP063 contributes to ast emp063 01 through recurring collaboration, clear ownership boundaries, and measurable outcomes. The team captures decisions, open issues, and handoffs so that knowledge remains discoverable for future programs.</a:t>
+            </a:r>
+          </a:p>
+          <a:p>
+            <a:pPr lvl="1"/>
+            <a:r>
+              <a:t>Section 2: Quarterly delivery milestones. EMP063 contributes to ast emp063 01 through recurring collaboration, clear ownership boundaries, and measurable outcomes. The team captures decisions, open issues, and handoffs so that knowledge remains discoverable for future programs.</a:t>
+            </a:r>
+          </a:p>
+          <a:p>
+            <a:pPr lvl="1"/>
+            <a:r>
+              <a:t>Section 3: Department KPI performance. EMP063 contributes to ast emp063 01 through recurring collaboration, clear ownership boundaries, and measurable outcomes. The team captures decisions, open issues, and handoffs so that knowledge remains discoverable for future programs.</a:t>
             </a:r>
           </a:p>
         </p:txBody>
@@ -3172,7 +3186,7 @@
           <a:lstStyle/>
           <a:p>
             <a:r>
-              <a:t>Research Portfolio Status</a:t>
+              <a:t>Ast Emp063 01 - EMP063</a:t>
             </a:r>
           </a:p>
         </p:txBody>
@@ -3193,17 +3207,25 @@
           <a:lstStyle/>
           <a:p>
             <a:r>
-              <a:t>Overview of Research Portfolio Status for R&amp;D department.</a:t>
-            </a:r>
-          </a:p>
-          <a:p>
-            <a:r>
-              <a:t>Responsible: Taylor Miller (Director)</a:t>
-            </a:r>
-          </a:p>
-          <a:p>
-            <a:r>
-              <a:t>Location: Portland | Skills: Ontology, Kusto, Python, TypeScript</a:t>
+              <a:t>Slide 2: Executive Summary</a:t>
+            </a:r>
+          </a:p>
+          <a:p>
+            <a:pPr lvl="1"/>
+            <a:r>
+              <a:t>Section 1: Quarterly delivery milestones. EMP063 contributes to ast emp063 01 through recurring collaboration, clear ownership boundaries, and measurable outcomes. The team captures decisions, open issues, and handoffs so that knowledge remains discoverable for future programs.</a:t>
+            </a:r>
+          </a:p>
+          <a:p>
+            <a:pPr lvl="1"/>
+            <a:r>
+              <a:t>Section 2: Knowledge transfer and onboarding. EMP063 contributes to ast emp063 01 through recurring collaboration, clear ownership boundaries, and measurable outcomes. The team captures decisions, open issues, and handoffs so that knowledge remains discoverable for future programs.</a:t>
+            </a:r>
+          </a:p>
+          <a:p>
+            <a:pPr lvl="1"/>
+            <a:r>
+              <a:t>Section 3: Fabric semantic model planning. EMP063 contributes to ast emp063 01 through recurring collaboration, clear ownership boundaries, and measurable outcomes. The team captures decisions, open issues, and handoffs so that knowledge remains discoverable for future programs.</a:t>
             </a:r>
           </a:p>
         </p:txBody>
@@ -3242,7 +3264,7 @@
           <a:lstStyle/>
           <a:p>
             <a:r>
-              <a:t>IP Filing Pipeline</a:t>
+              <a:t>Ast Emp063 01 - EMP063</a:t>
             </a:r>
           </a:p>
         </p:txBody>
@@ -3263,17 +3285,25 @@
           <a:lstStyle/>
           <a:p>
             <a:r>
-              <a:t>Overview of IP Filing Pipeline for R&amp;D department.</a:t>
-            </a:r>
-          </a:p>
-          <a:p>
-            <a:r>
-              <a:t>Responsible: Taylor Miller (Director)</a:t>
-            </a:r>
-          </a:p>
-          <a:p>
-            <a:r>
-              <a:t>Location: Portland | Skills: Ontology, Kusto, Python, TypeScript</a:t>
+              <a:t>Slide 3: Executive Summary</a:t>
+            </a:r>
+          </a:p>
+          <a:p>
+            <a:pPr lvl="1"/>
+            <a:r>
+              <a:t>Section 1: Department KPI performance. EMP063 contributes to ast emp063 01 through recurring collaboration, clear ownership boundaries, and measurable outcomes. The team captures decisions, open issues, and handoffs so that knowledge remains discoverable for future programs.</a:t>
+            </a:r>
+          </a:p>
+          <a:p>
+            <a:pPr lvl="1"/>
+            <a:r>
+              <a:t>Section 2: Customer escalation analysis. EMP063 contributes to ast emp063 01 through recurring collaboration, clear ownership boundaries, and measurable outcomes. The team captures decisions, open issues, and handoffs so that knowledge remains discoverable for future programs.</a:t>
+            </a:r>
+          </a:p>
+          <a:p>
+            <a:pPr lvl="1"/>
+            <a:r>
+              <a:t>Section 3: Operational risk review. EMP063 contributes to ast emp063 01 through recurring collaboration, clear ownership boundaries, and measurable outcomes. The team captures decisions, open issues, and handoffs so that knowledge remains discoverable for future programs.</a:t>
             </a:r>
           </a:p>
         </p:txBody>
@@ -3312,7 +3342,7 @@
           <a:lstStyle/>
           <a:p>
             <a:r>
-              <a:t>Technology Readiness Levels</a:t>
+              <a:t>Ast Emp063 01 - EMP063</a:t>
             </a:r>
           </a:p>
         </p:txBody>
@@ -3333,17 +3363,103 @@
           <a:lstStyle/>
           <a:p>
             <a:r>
-              <a:t>Overview of Technology Readiness Levels for R&amp;D department.</a:t>
-            </a:r>
-          </a:p>
-          <a:p>
-            <a:r>
-              <a:t>Responsible: Taylor Miller (Director)</a:t>
-            </a:r>
-          </a:p>
-          <a:p>
-            <a:r>
-              <a:t>Location: Portland | Skills: Ontology, Kusto, Python, TypeScript</a:t>
+              <a:t>Slide 4: Executive Summary</a:t>
+            </a:r>
+          </a:p>
+          <a:p>
+            <a:pPr lvl="1"/>
+            <a:r>
+              <a:t>Section 1: Operational risk review. EMP063 contributes to ast emp063 01 through recurring collaboration, clear ownership boundaries, and measurable outcomes. The team captures decisions, open issues, and handoffs so that knowledge remains discoverable for future programs.</a:t>
+            </a:r>
+          </a:p>
+          <a:p>
+            <a:pPr lvl="1"/>
+            <a:r>
+              <a:t>Section 2: Customer escalation analysis. EMP063 contributes to ast emp063 01 through recurring collaboration, clear ownership boundaries, and measurable outcomes. The team captures decisions, open issues, and handoffs so that knowledge remains discoverable for future programs.</a:t>
+            </a:r>
+          </a:p>
+          <a:p>
+            <a:pPr lvl="1"/>
+            <a:r>
+              <a:t>Section 3: Fabric semantic model planning. EMP063 contributes to ast emp063 01 through recurring collaboration, clear ownership boundaries, and measurable outcomes. The team captures decisions, open issues, and handoffs so that knowledge remains discoverable for future programs.</a:t>
+            </a:r>
+          </a:p>
+        </p:txBody>
+      </p:sp>
+    </p:spTree>
+  </p:cSld>
+  <p:clrMapOvr>
+    <a:masterClrMapping/>
+  </p:clrMapOvr>
+</p:sld>
+</file>
+
+<file path=ppt/slides/slide5.xml><?xml version="1.0" encoding="utf-8"?>
+<p:sld xmlns:a="http://schemas.openxmlformats.org/drawingml/2006/main" xmlns:p="http://schemas.openxmlformats.org/presentationml/2006/main" xmlns:r="http://schemas.openxmlformats.org/officeDocument/2006/relationships">
+  <p:cSld>
+    <p:spTree>
+      <p:nvGrpSpPr>
+        <p:cNvPr id="1" name=""/>
+        <p:cNvGrpSpPr/>
+        <p:nvPr/>
+      </p:nvGrpSpPr>
+      <p:grpSpPr/>
+      <p:sp>
+        <p:nvSpPr>
+          <p:cNvPr id="2" name="Title 1"/>
+          <p:cNvSpPr>
+            <a:spLocks noGrp="1"/>
+          </p:cNvSpPr>
+          <p:nvPr>
+            <p:ph type="title"/>
+          </p:nvPr>
+        </p:nvSpPr>
+        <p:spPr/>
+        <p:txBody>
+          <a:bodyPr/>
+          <a:lstStyle/>
+          <a:p>
+            <a:r>
+              <a:t>Ast Emp063 01 - EMP063</a:t>
+            </a:r>
+          </a:p>
+        </p:txBody>
+      </p:sp>
+      <p:sp>
+        <p:nvSpPr>
+          <p:cNvPr id="3" name="Content Placeholder 2"/>
+          <p:cNvSpPr>
+            <a:spLocks noGrp="1"/>
+          </p:cNvSpPr>
+          <p:nvPr>
+            <p:ph idx="1"/>
+          </p:nvPr>
+        </p:nvSpPr>
+        <p:spPr/>
+        <p:txBody>
+          <a:bodyPr/>
+          <a:lstStyle/>
+          <a:p>
+            <a:r>
+              <a:t>Slide 5: Executive Summary</a:t>
+            </a:r>
+          </a:p>
+          <a:p>
+            <a:pPr lvl="1"/>
+            <a:r>
+              <a:t>Section 1: Quarterly delivery milestones. EMP063 contributes to ast emp063 01 through recurring collaboration, clear ownership boundaries, and measurable outcomes. The team captures decisions, open issues, and handoffs so that knowledge remains discoverable for future programs.</a:t>
+            </a:r>
+          </a:p>
+          <a:p>
+            <a:pPr lvl="1"/>
+            <a:r>
+              <a:t>Section 2: Customer escalation analysis. EMP063 contributes to ast emp063 01 through recurring collaboration, clear ownership boundaries, and measurable outcomes. The team captures decisions, open issues, and handoffs so that knowledge remains discoverable for future programs.</a:t>
+            </a:r>
+          </a:p>
+          <a:p>
+            <a:pPr lvl="1"/>
+            <a:r>
+              <a:t>Section 3: Customer escalation analysis. EMP063 contributes to ast emp063 01 through recurring collaboration, clear ownership boundaries, and measurable outcomes. The team captures decisions, open issues, and handoffs so that knowledge remains discoverable for future programs.</a:t>
             </a:r>
           </a:p>
         </p:txBody>
